--- a/static/teaching/Lecture08Innovation.pptx
+++ b/static/teaching/Lecture08Innovation.pptx
@@ -242,7 +242,7 @@
             <a:fld id="{1466404D-4EBB-432A-B2AA-352C57A55E61}" type="datetimeFigureOut">
               <a:rPr lang="en-US" smtClean="0"/>
               <a:pPr/>
-              <a:t>10/14/2025</a:t>
+              <a:t>10/18/2026</a:t>
             </a:fld>
             <a:endParaRPr lang="en-US"/>
           </a:p>
@@ -409,7 +409,7 @@
             <a:fld id="{FD6C9007-AF00-4E6D-B5B0-05C25866FB7E}" type="datetimeFigureOut">
               <a:rPr lang="en-US" smtClean="0"/>
               <a:pPr/>
-              <a:t>10/14/2025</a:t>
+              <a:t>10/18/2026</a:t>
             </a:fld>
             <a:endParaRPr lang="en-US"/>
           </a:p>
@@ -2150,7 +2150,7 @@
             <a:fld id="{9D414917-4648-4D68-9920-80C5EE7212EB}" type="datetime1">
               <a:rPr lang="en-US" smtClean="0"/>
               <a:pPr/>
-              <a:t>10/14/2025</a:t>
+              <a:t>10/18/2026</a:t>
             </a:fld>
             <a:endParaRPr lang="en-US"/>
           </a:p>
@@ -2315,7 +2315,7 @@
             <a:fld id="{217E57DB-DBCF-4B05-9AA2-C7CCA49AA354}" type="datetime1">
               <a:rPr lang="en-US" smtClean="0"/>
               <a:pPr/>
-              <a:t>10/14/2025</a:t>
+              <a:t>10/18/2026</a:t>
             </a:fld>
             <a:endParaRPr lang="en-US"/>
           </a:p>
@@ -2490,7 +2490,7 @@
             <a:fld id="{BF98D0FF-6D17-4444-81F6-DFA75F240060}" type="datetime1">
               <a:rPr lang="en-US" smtClean="0"/>
               <a:pPr/>
-              <a:t>10/14/2025</a:t>
+              <a:t>10/18/2026</a:t>
             </a:fld>
             <a:endParaRPr lang="en-US"/>
           </a:p>
@@ -2655,7 +2655,7 @@
             <a:fld id="{A726364D-03FD-4241-B0C2-771E756BF112}" type="datetime1">
               <a:rPr lang="en-US" smtClean="0"/>
               <a:pPr/>
-              <a:t>10/14/2025</a:t>
+              <a:t>10/18/2026</a:t>
             </a:fld>
             <a:endParaRPr lang="en-US"/>
           </a:p>
@@ -2897,7 +2897,7 @@
             <a:fld id="{3C7C0DDF-F4DB-4850-9759-3F43F21898C6}" type="datetime1">
               <a:rPr lang="en-US" smtClean="0"/>
               <a:pPr/>
-              <a:t>10/14/2025</a:t>
+              <a:t>10/18/2026</a:t>
             </a:fld>
             <a:endParaRPr lang="en-US"/>
           </a:p>
@@ -3179,7 +3179,7 @@
             <a:fld id="{B30B0988-0504-4BD2-966C-3052193E857C}" type="datetime1">
               <a:rPr lang="en-US" smtClean="0"/>
               <a:pPr/>
-              <a:t>10/14/2025</a:t>
+              <a:t>10/18/2026</a:t>
             </a:fld>
             <a:endParaRPr lang="en-US"/>
           </a:p>
@@ -3595,7 +3595,7 @@
             <a:fld id="{561EA8C1-F1F5-404B-B201-AE8FF6C3A217}" type="datetime1">
               <a:rPr lang="en-US" smtClean="0"/>
               <a:pPr/>
-              <a:t>10/14/2025</a:t>
+              <a:t>10/18/2026</a:t>
             </a:fld>
             <a:endParaRPr lang="en-US"/>
           </a:p>
@@ -3709,7 +3709,7 @@
             <a:fld id="{1FDB9A83-65A0-43AE-93C3-A17291B2919D}" type="datetime1">
               <a:rPr lang="en-US" smtClean="0"/>
               <a:pPr/>
-              <a:t>10/14/2025</a:t>
+              <a:t>10/18/2026</a:t>
             </a:fld>
             <a:endParaRPr lang="en-US"/>
           </a:p>
@@ -3801,7 +3801,7 @@
             <a:fld id="{7A7B72C0-D993-4451-AB0F-E3A355F8778B}" type="datetime1">
               <a:rPr lang="en-US" smtClean="0"/>
               <a:pPr/>
-              <a:t>10/14/2025</a:t>
+              <a:t>10/18/2026</a:t>
             </a:fld>
             <a:endParaRPr lang="en-US"/>
           </a:p>
@@ -4073,7 +4073,7 @@
             <a:fld id="{4F1F2440-3EB8-48C4-B49D-E23BD64B89A1}" type="datetime1">
               <a:rPr lang="en-US" smtClean="0"/>
               <a:pPr/>
-              <a:t>10/14/2025</a:t>
+              <a:t>10/18/2026</a:t>
             </a:fld>
             <a:endParaRPr lang="en-US"/>
           </a:p>
@@ -4322,7 +4322,7 @@
             <a:fld id="{DB5A34A5-48CA-4D37-9297-4165EBEFCD6C}" type="datetime1">
               <a:rPr lang="en-US" smtClean="0"/>
               <a:pPr/>
-              <a:t>10/14/2025</a:t>
+              <a:t>10/18/2026</a:t>
             </a:fld>
             <a:endParaRPr lang="en-US"/>
           </a:p>
@@ -4530,7 +4530,7 @@
             <a:fld id="{ADB7E6CB-A541-489D-B723-B3197826A0CC}" type="datetime1">
               <a:rPr lang="en-US" smtClean="0"/>
               <a:pPr/>
-              <a:t>10/14/2025</a:t>
+              <a:t>10/18/2026</a:t>
             </a:fld>
             <a:endParaRPr lang="en-US"/>
           </a:p>
@@ -5106,10 +5106,7 @@
                 </a:pPr>
                 <a14:m>
                   <m:oMathPara xmlns:m="http://schemas.openxmlformats.org/officeDocument/2006/math">
-                    <m:oMathParaPr>
-                      <m:jc m:val="centerGroup"/>
-                    </m:oMathParaPr>
-                    <m:oMath xmlns:m="http://schemas.openxmlformats.org/officeDocument/2006/math">
+                    <m:oMath>
                       <m:sSub>
                         <m:sSubPr>
                           <m:ctrlPr>
@@ -5279,14 +5276,11 @@
                 </a:pPr>
                 <a14:m>
                   <m:oMathPara xmlns:m="http://schemas.openxmlformats.org/officeDocument/2006/math">
-                    <m:oMathParaPr>
-                      <m:jc m:val="centerGroup"/>
-                    </m:oMathParaPr>
-                    <m:oMath xmlns:m="http://schemas.openxmlformats.org/officeDocument/2006/math">
+                    <m:oMath>
                       <m:f>
                         <m:fPr>
                           <m:ctrlPr>
-                            <a:rPr lang="en-US" i="1" smtClean="0">
+                            <a:rPr lang="en-US" i="1">
                               <a:latin typeface="Cambria Math" panose="02040503050406030204" pitchFamily="18" charset="0"/>
                             </a:rPr>
                           </m:ctrlPr>
@@ -5418,14 +5412,11 @@
                 </a:pPr>
                 <a14:m>
                   <m:oMathPara xmlns:m="http://schemas.openxmlformats.org/officeDocument/2006/math">
-                    <m:oMathParaPr>
-                      <m:jc m:val="centerGroup"/>
-                    </m:oMathParaPr>
-                    <m:oMath xmlns:m="http://schemas.openxmlformats.org/officeDocument/2006/math">
+                    <m:oMath>
                       <m:sSub>
                         <m:sSubPr>
                           <m:ctrlPr>
-                            <a:rPr lang="en-US" i="1" smtClean="0">
+                            <a:rPr lang="en-US" b="0" i="1" smtClean="0">
                               <a:latin typeface="Cambria Math" panose="02040503050406030204" pitchFamily="18" charset="0"/>
                             </a:rPr>
                           </m:ctrlPr>
@@ -6035,7 +6026,7 @@
                     <m:sSub>
                       <m:sSubPr>
                         <m:ctrlPr>
-                          <a:rPr lang="en-US" i="1" smtClean="0">
+                          <a:rPr lang="en-US" b="0" i="1" smtClean="0">
                             <a:latin typeface="Cambria Math" panose="02040503050406030204" pitchFamily="18" charset="0"/>
                           </a:rPr>
                         </m:ctrlPr>
@@ -6174,11 +6165,15 @@
                         <m:ctrlPr>
                           <a:rPr lang="en-US" i="1">
                             <a:latin typeface="Cambria Math" panose="02040503050406030204" pitchFamily="18" charset="0"/>
+                            <a:ea typeface="Cambria Math" panose="02040503050406030204" pitchFamily="18" charset="0"/>
                           </a:rPr>
                         </m:ctrlPr>
                       </m:accPr>
                       <m:e>
                         <m:r>
+                          <m:rPr>
+                            <m:sty m:val="p"/>
+                          </m:rPr>
                           <a:rPr lang="en-US" i="1">
                             <a:latin typeface="Cambria Math" panose="02040503050406030204" pitchFamily="18" charset="0"/>
                             <a:ea typeface="Cambria Math" panose="02040503050406030204" pitchFamily="18" charset="0"/>
@@ -6598,11 +6593,15 @@
                         <m:ctrlPr>
                           <a:rPr lang="en-US" i="1">
                             <a:latin typeface="Cambria Math" panose="02040503050406030204" pitchFamily="18" charset="0"/>
+                            <a:ea typeface="Cambria Math" panose="02040503050406030204" pitchFamily="18" charset="0"/>
                           </a:rPr>
                         </m:ctrlPr>
                       </m:accPr>
                       <m:e>
                         <m:r>
+                          <m:rPr>
+                            <m:sty m:val="p"/>
+                          </m:rPr>
                           <a:rPr lang="en-US" i="1">
                             <a:latin typeface="Cambria Math" panose="02040503050406030204" pitchFamily="18" charset="0"/>
                             <a:ea typeface="Cambria Math" panose="02040503050406030204" pitchFamily="18" charset="0"/>
@@ -6655,10 +6654,7 @@
                 </a:pPr>
                 <a14:m>
                   <m:oMathPara xmlns:m="http://schemas.openxmlformats.org/officeDocument/2006/math">
-                    <m:oMathParaPr>
-                      <m:jc m:val="centerGroup"/>
-                    </m:oMathParaPr>
-                    <m:oMath xmlns:m="http://schemas.openxmlformats.org/officeDocument/2006/math">
+                    <m:oMath>
                       <m:sSub>
                         <m:sSubPr>
                           <m:ctrlPr>
@@ -6696,11 +6692,15 @@
                           <m:ctrlPr>
                             <a:rPr lang="en-US" i="1">
                               <a:latin typeface="Cambria Math" panose="02040503050406030204" pitchFamily="18" charset="0"/>
+                              <a:ea typeface="Cambria Math" panose="02040503050406030204" pitchFamily="18" charset="0"/>
                             </a:rPr>
                           </m:ctrlPr>
                         </m:accPr>
                         <m:e>
                           <m:r>
+                            <m:rPr>
+                              <m:sty m:val="p"/>
+                            </m:rPr>
                             <a:rPr lang="en-US" i="1">
                               <a:latin typeface="Cambria Math" panose="02040503050406030204" pitchFamily="18" charset="0"/>
                               <a:ea typeface="Cambria Math" panose="02040503050406030204" pitchFamily="18" charset="0"/>
@@ -6926,11 +6926,15 @@
                         <m:ctrlPr>
                           <a:rPr lang="en-US" i="1">
                             <a:latin typeface="Cambria Math" panose="02040503050406030204" pitchFamily="18" charset="0"/>
+                            <a:ea typeface="Cambria Math" panose="02040503050406030204" pitchFamily="18" charset="0"/>
                           </a:rPr>
                         </m:ctrlPr>
                       </m:accPr>
                       <m:e>
                         <m:r>
+                          <m:rPr>
+                            <m:sty m:val="p"/>
+                          </m:rPr>
                           <a:rPr lang="en-US" i="1">
                             <a:latin typeface="Cambria Math" panose="02040503050406030204" pitchFamily="18" charset="0"/>
                             <a:ea typeface="Cambria Math" panose="02040503050406030204" pitchFamily="18" charset="0"/>
@@ -7094,11 +7098,15 @@
                         <m:ctrlPr>
                           <a:rPr lang="en-US" i="1">
                             <a:latin typeface="Cambria Math" panose="02040503050406030204" pitchFamily="18" charset="0"/>
+                            <a:ea typeface="Cambria Math" panose="02040503050406030204" pitchFamily="18" charset="0"/>
                           </a:rPr>
                         </m:ctrlPr>
                       </m:accPr>
                       <m:e>
                         <m:r>
+                          <m:rPr>
+                            <m:sty m:val="p"/>
+                          </m:rPr>
                           <a:rPr lang="en-US" i="1">
                             <a:latin typeface="Cambria Math" panose="02040503050406030204" pitchFamily="18" charset="0"/>
                             <a:ea typeface="Cambria Math" panose="02040503050406030204" pitchFamily="18" charset="0"/>
@@ -7729,7 +7737,7 @@
                     <m:f>
                       <m:fPr>
                         <m:ctrlPr>
-                          <a:rPr lang="en-US" b="0" i="1" smtClean="0">
+                          <a:rPr lang="en-US" i="1">
                             <a:latin typeface="Cambria Math" panose="02040503050406030204" pitchFamily="18" charset="0"/>
                           </a:rPr>
                         </m:ctrlPr>
@@ -7848,11 +7856,15 @@
                         <m:ctrlPr>
                           <a:rPr lang="en-US" i="1">
                             <a:latin typeface="Cambria Math" panose="02040503050406030204" pitchFamily="18" charset="0"/>
+                            <a:ea typeface="Cambria Math" panose="02040503050406030204" pitchFamily="18" charset="0"/>
                           </a:rPr>
                         </m:ctrlPr>
                       </m:accPr>
                       <m:e>
                         <m:r>
+                          <m:rPr>
+                            <m:sty m:val="p"/>
+                          </m:rPr>
                           <a:rPr lang="en-US" i="1">
                             <a:latin typeface="Cambria Math" panose="02040503050406030204" pitchFamily="18" charset="0"/>
                             <a:ea typeface="Cambria Math" panose="02040503050406030204" pitchFamily="18" charset="0"/>
@@ -7908,10 +7920,7 @@
                 </a:pPr>
                 <a14:m>
                   <m:oMathPara xmlns:m="http://schemas.openxmlformats.org/officeDocument/2006/math">
-                    <m:oMathParaPr>
-                      <m:jc m:val="centerGroup"/>
-                    </m:oMathParaPr>
-                    <m:oMath xmlns:m="http://schemas.openxmlformats.org/officeDocument/2006/math">
+                    <m:oMath>
                       <m:sSub>
                         <m:sSubPr>
                           <m:ctrlPr>
@@ -7987,11 +7996,15 @@
                           <m:ctrlPr>
                             <a:rPr lang="en-US" i="1">
                               <a:latin typeface="Cambria Math" panose="02040503050406030204" pitchFamily="18" charset="0"/>
+                              <a:ea typeface="Cambria Math" panose="02040503050406030204" pitchFamily="18" charset="0"/>
                             </a:rPr>
                           </m:ctrlPr>
                         </m:accPr>
                         <m:e>
                           <m:r>
+                            <m:rPr>
+                              <m:sty m:val="p"/>
+                            </m:rPr>
                             <a:rPr lang="en-US" i="1">
                               <a:latin typeface="Cambria Math" panose="02040503050406030204" pitchFamily="18" charset="0"/>
                               <a:ea typeface="Cambria Math" panose="02040503050406030204" pitchFamily="18" charset="0"/>
@@ -8424,14 +8437,11 @@
                 </a:pPr>
                 <a14:m>
                   <m:oMathPara xmlns:m="http://schemas.openxmlformats.org/officeDocument/2006/math">
-                    <m:oMathParaPr>
-                      <m:jc m:val="centerGroup"/>
-                    </m:oMathParaPr>
-                    <m:oMath xmlns:m="http://schemas.openxmlformats.org/officeDocument/2006/math">
+                    <m:oMath>
                       <m:sSub>
                         <m:sSubPr>
                           <m:ctrlPr>
-                            <a:rPr lang="en-US" i="1" smtClean="0">
+                            <a:rPr lang="en-US" i="1">
                               <a:latin typeface="Cambria Math" panose="02040503050406030204" pitchFamily="18" charset="0"/>
                             </a:rPr>
                           </m:ctrlPr>
@@ -8503,11 +8513,15 @@
                           <m:ctrlPr>
                             <a:rPr lang="en-US" i="1">
                               <a:latin typeface="Cambria Math" panose="02040503050406030204" pitchFamily="18" charset="0"/>
+                              <a:ea typeface="Cambria Math" panose="02040503050406030204" pitchFamily="18" charset="0"/>
                             </a:rPr>
                           </m:ctrlPr>
                         </m:accPr>
                         <m:e>
                           <m:r>
+                            <m:rPr>
+                              <m:sty m:val="p"/>
+                            </m:rPr>
                             <a:rPr lang="en-US" i="1">
                               <a:latin typeface="Cambria Math" panose="02040503050406030204" pitchFamily="18" charset="0"/>
                               <a:ea typeface="Cambria Math" panose="02040503050406030204" pitchFamily="18" charset="0"/>
@@ -8909,7 +8923,7 @@
         <p:spPr>
           <a:xfrm>
             <a:off x="5791200" y="6093896"/>
-            <a:ext cx="4610686" cy="369332"/>
+            <a:ext cx="4732514" cy="369332"/>
           </a:xfrm>
           <a:prstGeom prst="rect">
             <a:avLst/>
@@ -8924,7 +8938,7 @@
           <a:p>
             <a:r>
               <a:rPr lang="en-US" dirty="0"/>
-              <a:t>Source: Bloom, Jones, Van Reene, Webb (2020)</a:t>
+              <a:t>Source: Bloom, Jones, Van Reenen, Webb (2020)</a:t>
             </a:r>
           </a:p>
         </p:txBody>
@@ -8965,10 +8979,7 @@
                 </a:pPr>
                 <a14:m>
                   <m:oMathPara xmlns:m="http://schemas.openxmlformats.org/officeDocument/2006/math">
-                    <m:oMathParaPr>
-                      <m:jc m:val="centerGroup"/>
-                    </m:oMathParaPr>
-                    <m:oMath xmlns:m="http://schemas.openxmlformats.org/officeDocument/2006/math">
+                    <m:oMath>
                       <m:sSub>
                         <m:sSubPr>
                           <m:ctrlPr>
@@ -9013,11 +9024,15 @@
                           <m:ctrlPr>
                             <a:rPr lang="en-US" i="1">
                               <a:latin typeface="Cambria Math" panose="02040503050406030204" pitchFamily="18" charset="0"/>
+                              <a:ea typeface="Cambria Math" panose="02040503050406030204" pitchFamily="18" charset="0"/>
                             </a:rPr>
                           </m:ctrlPr>
                         </m:accPr>
                         <m:e>
                           <m:r>
+                            <m:rPr>
+                              <m:sty m:val="p"/>
+                            </m:rPr>
                             <a:rPr lang="en-US" i="1">
                               <a:latin typeface="Cambria Math" panose="02040503050406030204" pitchFamily="18" charset="0"/>
                               <a:ea typeface="Cambria Math" panose="02040503050406030204" pitchFamily="18" charset="0"/>
@@ -9174,37 +9189,6 @@
                                           </p:stCondLst>
                                         </p:cTn>
                                         <p:tgtEl>
-                                          <p:spTgt spid="3">
-                                            <p:txEl>
-                                              <p:pRg st="4" end="4"/>
-                                            </p:txEl>
-                                          </p:spTgt>
-                                        </p:tgtEl>
-                                        <p:attrNameLst>
-                                          <p:attrName>style.visibility</p:attrName>
-                                        </p:attrNameLst>
-                                      </p:cBhvr>
-                                      <p:to>
-                                        <p:strVal val="visible"/>
-                                      </p:to>
-                                    </p:set>
-                                  </p:childTnLst>
-                                </p:cTn>
-                              </p:par>
-                              <p:par>
-                                <p:cTn id="7" presetID="1" presetClass="entr" presetSubtype="0" fill="hold" nodeType="withEffect">
-                                  <p:stCondLst>
-                                    <p:cond delay="0"/>
-                                  </p:stCondLst>
-                                  <p:childTnLst>
-                                    <p:set>
-                                      <p:cBhvr>
-                                        <p:cTn id="8" dur="1" fill="hold">
-                                          <p:stCondLst>
-                                            <p:cond delay="0"/>
-                                          </p:stCondLst>
-                                        </p:cTn>
-                                        <p:tgtEl>
                                           <p:spTgt spid="7"/>
                                         </p:tgtEl>
                                         <p:attrNameLst>
@@ -9219,7 +9203,34 @@
                                 </p:cTn>
                               </p:par>
                               <p:par>
-                                <p:cTn id="9" presetID="1" presetClass="entr" presetSubtype="0" fill="hold" grpId="0" nodeType="withEffect">
+                                <p:cTn id="7" presetID="1" presetClass="entr" presetSubtype="0" fill="hold" grpId="0" nodeType="withEffect">
+                                  <p:stCondLst>
+                                    <p:cond delay="0"/>
+                                  </p:stCondLst>
+                                  <p:childTnLst>
+                                    <p:set>
+                                      <p:cBhvr>
+                                        <p:cTn id="8" dur="1" fill="hold">
+                                          <p:stCondLst>
+                                            <p:cond delay="0"/>
+                                          </p:stCondLst>
+                                        </p:cTn>
+                                        <p:tgtEl>
+                                          <p:spTgt spid="8"/>
+                                        </p:tgtEl>
+                                        <p:attrNameLst>
+                                          <p:attrName>style.visibility</p:attrName>
+                                        </p:attrNameLst>
+                                      </p:cBhvr>
+                                      <p:to>
+                                        <p:strVal val="visible"/>
+                                      </p:to>
+                                    </p:set>
+                                  </p:childTnLst>
+                                </p:cTn>
+                              </p:par>
+                              <p:par>
+                                <p:cTn id="9" presetID="1" presetClass="entr" presetSubtype="0" fill="hold" nodeType="withEffect">
                                   <p:stCondLst>
                                     <p:cond delay="0"/>
                                   </p:stCondLst>
@@ -9232,7 +9243,11 @@
                                           </p:stCondLst>
                                         </p:cTn>
                                         <p:tgtEl>
-                                          <p:spTgt spid="8"/>
+                                          <p:spTgt spid="3">
+                                            <p:txEl>
+                                              <p:pRg st="4" end="4"/>
+                                            </p:txEl>
+                                          </p:spTgt>
                                         </p:tgtEl>
                                         <p:attrNameLst>
                                           <p:attrName>style.visibility</p:attrName>
@@ -9364,10 +9379,7 @@
                 </a:pPr>
                 <a14:m>
                   <m:oMathPara xmlns:m="http://schemas.openxmlformats.org/officeDocument/2006/math">
-                    <m:oMathParaPr>
-                      <m:jc m:val="centerGroup"/>
-                    </m:oMathParaPr>
-                    <m:oMath xmlns:m="http://schemas.openxmlformats.org/officeDocument/2006/math">
+                    <m:oMath>
                       <m:sSub>
                         <m:sSubPr>
                           <m:ctrlPr>
@@ -9474,7 +9486,7 @@
                       <m:sSubSup>
                         <m:sSubSupPr>
                           <m:ctrlPr>
-                            <a:rPr lang="en-US" i="1" smtClean="0">
+                            <a:rPr lang="en-US" b="0" i="1" smtClean="0">
                               <a:latin typeface="Cambria Math" panose="02040503050406030204" pitchFamily="18" charset="0"/>
                               <a:ea typeface="Cambria Math" panose="02040503050406030204" pitchFamily="18" charset="0"/>
                             </a:rPr>
@@ -9735,7 +9747,7 @@
                     <m:sSub>
                       <m:sSubPr>
                         <m:ctrlPr>
-                          <a:rPr lang="en-US" i="1" smtClean="0">
+                          <a:rPr lang="en-US" i="1">
                             <a:latin typeface="Cambria Math" panose="02040503050406030204" pitchFamily="18" charset="0"/>
                           </a:rPr>
                         </m:ctrlPr>
@@ -9914,7 +9926,7 @@
                     <m:f>
                       <m:fPr>
                         <m:ctrlPr>
-                          <a:rPr lang="en-US" b="0" i="1" smtClean="0">
+                          <a:rPr lang="en-US" i="1">
                             <a:latin typeface="Cambria Math" panose="02040503050406030204" pitchFamily="18" charset="0"/>
                           </a:rPr>
                         </m:ctrlPr>
@@ -10040,11 +10052,15 @@
                         <m:ctrlPr>
                           <a:rPr lang="en-US" i="1">
                             <a:latin typeface="Cambria Math" panose="02040503050406030204" pitchFamily="18" charset="0"/>
+                            <a:ea typeface="Cambria Math" panose="02040503050406030204" pitchFamily="18" charset="0"/>
                           </a:rPr>
                         </m:ctrlPr>
                       </m:accPr>
                       <m:e>
                         <m:r>
+                          <m:rPr>
+                            <m:sty m:val="p"/>
+                          </m:rPr>
                           <a:rPr lang="en-US" i="1">
                             <a:latin typeface="Cambria Math" panose="02040503050406030204" pitchFamily="18" charset="0"/>
                             <a:ea typeface="Cambria Math" panose="02040503050406030204" pitchFamily="18" charset="0"/>
@@ -10191,10 +10207,7 @@
                 </a:pPr>
                 <a14:m>
                   <m:oMathPara xmlns:m="http://schemas.openxmlformats.org/officeDocument/2006/math">
-                    <m:oMathParaPr>
-                      <m:jc m:val="centerGroup"/>
-                    </m:oMathParaPr>
-                    <m:oMath xmlns:m="http://schemas.openxmlformats.org/officeDocument/2006/math">
+                    <m:oMath>
                       <m:r>
                         <a:rPr lang="en-US" b="0" i="1" smtClean="0">
                           <a:latin typeface="Cambria Math" panose="02040503050406030204" pitchFamily="18" charset="0"/>
@@ -10235,7 +10248,7 @@
                       <m:d>
                         <m:dPr>
                           <m:ctrlPr>
-                            <a:rPr lang="en-US" b="0" i="1" smtClean="0">
+                            <a:rPr lang="en-US" i="1">
                               <a:latin typeface="Cambria Math" panose="02040503050406030204" pitchFamily="18" charset="0"/>
                               <a:ea typeface="Cambria Math" panose="02040503050406030204" pitchFamily="18" charset="0"/>
                             </a:rPr>
@@ -10303,10 +10316,7 @@
                 </a:pPr>
                 <a14:m>
                   <m:oMathPara xmlns:m="http://schemas.openxmlformats.org/officeDocument/2006/math">
-                    <m:oMathParaPr>
-                      <m:jc m:val="centerGroup"/>
-                    </m:oMathParaPr>
-                    <m:oMath xmlns:m="http://schemas.openxmlformats.org/officeDocument/2006/math">
+                    <m:oMath>
                       <m:sSub>
                         <m:sSubPr>
                           <m:ctrlPr>
@@ -11011,7 +11021,7 @@
           <p:cNvPr id="3" name="TextBox 2">
             <a:extLst>
               <a:ext uri="{FF2B5EF4-FFF2-40B4-BE49-F238E27FC236}">
-                <a16:creationId xmlns:a16="http://schemas.microsoft.com/office/drawing/2014/main" id="{4BFC9DFA-4D95-F2DE-E95B-55A5F4CF1213}"/>
+                <a16:creationId xmlns:a16="http://schemas.microsoft.com/office/drawing/2014/main" id="{8741E4AA-2D1B-C211-BE90-E751E1D7D70B}"/>
               </a:ext>
             </a:extLst>
           </p:cNvPr>
@@ -11020,7 +11030,42 @@
         </p:nvSpPr>
         <p:spPr>
           <a:xfrm>
-            <a:off x="762000" y="6248400"/>
+            <a:off x="6781800" y="6333434"/>
+            <a:ext cx="4547527" cy="369332"/>
+          </a:xfrm>
+          <a:prstGeom prst="rect">
+            <a:avLst/>
+          </a:prstGeom>
+          <a:noFill/>
+        </p:spPr>
+        <p:txBody>
+          <a:bodyPr wrap="none" rtlCol="0">
+            <a:spAutoFit/>
+          </a:bodyPr>
+          <a:lstStyle/>
+          <a:p>
+            <a:r>
+              <a:rPr lang="en-US" dirty="0"/>
+              <a:t>Data from 2015-2020. Fertility has fallen since.</a:t>
+            </a:r>
+          </a:p>
+        </p:txBody>
+      </p:sp>
+      <p:sp>
+        <p:nvSpPr>
+          <p:cNvPr id="5" name="TextBox 4">
+            <a:extLst>
+              <a:ext uri="{FF2B5EF4-FFF2-40B4-BE49-F238E27FC236}">
+                <a16:creationId xmlns:a16="http://schemas.microsoft.com/office/drawing/2014/main" id="{8ECE6A1C-E0FD-DBDB-BB4E-C15F51CAC134}"/>
+              </a:ext>
+            </a:extLst>
+          </p:cNvPr>
+          <p:cNvSpPr txBox="1"/>
+          <p:nvPr/>
+        </p:nvSpPr>
+        <p:spPr>
+          <a:xfrm>
+            <a:off x="533400" y="6248400"/>
             <a:ext cx="2124108" cy="369332"/>
           </a:xfrm>
           <a:prstGeom prst="rect">
@@ -11037,41 +11082,6 @@
             <a:r>
               <a:rPr lang="en-US" dirty="0"/>
               <a:t>Source: Jones (2022)</a:t>
-            </a:r>
-          </a:p>
-        </p:txBody>
-      </p:sp>
-      <p:sp>
-        <p:nvSpPr>
-          <p:cNvPr id="5" name="TextBox 4">
-            <a:extLst>
-              <a:ext uri="{FF2B5EF4-FFF2-40B4-BE49-F238E27FC236}">
-                <a16:creationId xmlns:a16="http://schemas.microsoft.com/office/drawing/2014/main" id="{CB382912-6940-8CB4-0828-DAE111544EA1}"/>
-              </a:ext>
-            </a:extLst>
-          </p:cNvPr>
-          <p:cNvSpPr txBox="1"/>
-          <p:nvPr/>
-        </p:nvSpPr>
-        <p:spPr>
-          <a:xfrm>
-            <a:off x="6858000" y="6333434"/>
-            <a:ext cx="4547527" cy="369332"/>
-          </a:xfrm>
-          <a:prstGeom prst="rect">
-            <a:avLst/>
-          </a:prstGeom>
-          <a:noFill/>
-        </p:spPr>
-        <p:txBody>
-          <a:bodyPr wrap="none" rtlCol="0">
-            <a:spAutoFit/>
-          </a:bodyPr>
-          <a:lstStyle/>
-          <a:p>
-            <a:r>
-              <a:rPr lang="en-US" dirty="0"/>
-              <a:t>Data from 2015-2022. Fertility has fallen since.</a:t>
             </a:r>
           </a:p>
         </p:txBody>
@@ -11152,8 +11162,8 @@
         </p:nvSpPr>
         <p:spPr>
           <a:xfrm>
-            <a:off x="304800" y="1600201"/>
-            <a:ext cx="11582400" cy="4983161"/>
+            <a:off x="304800" y="1417639"/>
+            <a:ext cx="11582400" cy="5440362"/>
           </a:xfrm>
         </p:spPr>
         <p:txBody>
@@ -11220,16 +11230,12 @@
             <a:pPr lvl="1"/>
             <a:r>
               <a:rPr lang="en-US" dirty="0"/>
-              <a:t>Automation of ideas could </a:t>
-            </a:r>
-            <a:r>
-              <a:rPr lang="en-US"/>
-              <a:t>even yield </a:t>
-            </a:r>
-            <a:r>
+              <a:t>Automation of ideas could even yield “singularity” (explosive growth) through recursive self-improvement</a:t>
+            </a:r>
+            <a:br>
               <a:rPr lang="en-US" dirty="0"/>
-              <a:t>“singularity” (explosive growth)</a:t>
-            </a:r>
+            </a:br>
+            <a:endParaRPr lang="en-US" dirty="0"/>
           </a:p>
         </p:txBody>
       </p:sp>
@@ -12597,15 +12603,33 @@
                                   </p:childTnLst>
                                 </p:cTn>
                               </p:par>
+                            </p:childTnLst>
+                          </p:cTn>
+                        </p:par>
+                      </p:childTnLst>
+                    </p:cTn>
+                  </p:par>
+                  <p:par>
+                    <p:cTn id="7" fill="hold">
+                      <p:stCondLst>
+                        <p:cond delay="indefinite"/>
+                      </p:stCondLst>
+                      <p:childTnLst>
+                        <p:par>
+                          <p:cTn id="8" fill="hold">
+                            <p:stCondLst>
+                              <p:cond delay="0"/>
+                            </p:stCondLst>
+                            <p:childTnLst>
                               <p:par>
-                                <p:cTn id="7" presetID="1" presetClass="entr" presetSubtype="0" fill="hold" nodeType="withEffect">
+                                <p:cTn id="9" presetID="1" presetClass="entr" presetSubtype="0" fill="hold" nodeType="clickEffect">
                                   <p:stCondLst>
                                     <p:cond delay="0"/>
                                   </p:stCondLst>
                                   <p:childTnLst>
                                     <p:set>
                                       <p:cBhvr>
-                                        <p:cTn id="8" dur="1" fill="hold">
+                                        <p:cTn id="10" dur="1" fill="hold">
                                           <p:stCondLst>
                                             <p:cond delay="0"/>
                                           </p:stCondLst>
@@ -12629,14 +12653,14 @@
                                 </p:cTn>
                               </p:par>
                               <p:par>
-                                <p:cTn id="9" presetID="1" presetClass="entr" presetSubtype="0" fill="hold" nodeType="withEffect">
+                                <p:cTn id="11" presetID="1" presetClass="entr" presetSubtype="0" fill="hold" nodeType="withEffect">
                                   <p:stCondLst>
                                     <p:cond delay="0"/>
                                   </p:stCondLst>
                                   <p:childTnLst>
                                     <p:set>
                                       <p:cBhvr>
-                                        <p:cTn id="10" dur="1" fill="hold">
+                                        <p:cTn id="12" dur="1" fill="hold">
                                           <p:stCondLst>
                                             <p:cond delay="0"/>
                                           </p:stCondLst>
@@ -12666,26 +12690,26 @@
                     </p:cTn>
                   </p:par>
                   <p:par>
-                    <p:cTn id="11" fill="hold">
+                    <p:cTn id="13" fill="hold">
                       <p:stCondLst>
                         <p:cond delay="indefinite"/>
                       </p:stCondLst>
                       <p:childTnLst>
                         <p:par>
-                          <p:cTn id="12" fill="hold">
+                          <p:cTn id="14" fill="hold">
                             <p:stCondLst>
                               <p:cond delay="0"/>
                             </p:stCondLst>
                             <p:childTnLst>
                               <p:par>
-                                <p:cTn id="13" presetID="1" presetClass="entr" presetSubtype="0" fill="hold" nodeType="clickEffect">
+                                <p:cTn id="15" presetID="1" presetClass="entr" presetSubtype="0" fill="hold" nodeType="clickEffect">
                                   <p:stCondLst>
                                     <p:cond delay="0"/>
                                   </p:stCondLst>
                                   <p:childTnLst>
                                     <p:set>
                                       <p:cBhvr>
-                                        <p:cTn id="14" dur="1" fill="hold">
+                                        <p:cTn id="16" dur="1" fill="hold">
                                           <p:stCondLst>
                                             <p:cond delay="0"/>
                                           </p:stCondLst>
@@ -12709,14 +12733,14 @@
                                 </p:cTn>
                               </p:par>
                               <p:par>
-                                <p:cTn id="15" presetID="1" presetClass="entr" presetSubtype="0" fill="hold" nodeType="withEffect">
+                                <p:cTn id="17" presetID="1" presetClass="entr" presetSubtype="0" fill="hold" nodeType="withEffect">
                                   <p:stCondLst>
                                     <p:cond delay="0"/>
                                   </p:stCondLst>
                                   <p:childTnLst>
                                     <p:set>
                                       <p:cBhvr>
-                                        <p:cTn id="16" dur="1" fill="hold">
+                                        <p:cTn id="18" dur="1" fill="hold">
                                           <p:stCondLst>
                                             <p:cond delay="0"/>
                                           </p:stCondLst>
@@ -16971,8 +16995,8 @@
                     <m:sSub>
                       <m:sSubPr>
                         <m:ctrlPr>
-                          <a:rPr lang="en-US" i="1" smtClean="0">
-                            <a:latin typeface="Cambria Math" panose="02040503050406030204" pitchFamily="18" charset="0"/>
+                          <a:rPr lang="en-US" b="0" i="1" smtClean="0">
+                            <a:latin typeface="Cambria Math"/>
                           </a:rPr>
                         </m:ctrlPr>
                       </m:sSubPr>
@@ -17368,10 +17392,7 @@
                 </a:pPr>
                 <a14:m>
                   <m:oMathPara xmlns:m="http://schemas.openxmlformats.org/officeDocument/2006/math">
-                    <m:oMathParaPr>
-                      <m:jc m:val="centerGroup"/>
-                    </m:oMathParaPr>
-                    <m:oMath xmlns:m="http://schemas.openxmlformats.org/officeDocument/2006/math">
+                    <m:oMath>
                       <m:sSub>
                         <m:sSubPr>
                           <m:ctrlPr>
@@ -17844,6 +17865,9 @@
               <a:rPr lang="en-US" dirty="0"/>
               <a:t>But we have growth in knowledge on top of that</a:t>
             </a:r>
+          </a:p>
+          <a:p>
+            <a:endParaRPr lang="en-US" dirty="0"/>
           </a:p>
         </p:txBody>
       </p:sp>
@@ -18152,10 +18176,7 @@
                 </a:pPr>
                 <a14:m>
                   <m:oMathPara xmlns:m="http://schemas.openxmlformats.org/officeDocument/2006/math">
-                    <m:oMathParaPr>
-                      <m:jc m:val="centerGroup"/>
-                    </m:oMathParaPr>
-                    <m:oMath xmlns:m="http://schemas.openxmlformats.org/officeDocument/2006/math">
+                    <m:oMath>
                       <m:sSub>
                         <m:sSubPr>
                           <m:ctrlPr>
@@ -18705,11 +18726,15 @@
                         <m:ctrlPr>
                           <a:rPr lang="en-US" i="1" smtClean="0">
                             <a:latin typeface="Cambria Math" panose="02040503050406030204" pitchFamily="18" charset="0"/>
+                            <a:ea typeface="Cambria Math" panose="02040503050406030204" pitchFamily="18" charset="0"/>
                           </a:rPr>
                         </m:ctrlPr>
                       </m:accPr>
                       <m:e>
                         <m:r>
+                          <m:rPr>
+                            <m:sty m:val="p"/>
+                          </m:rPr>
                           <a:rPr lang="en-US" i="1" smtClean="0">
                             <a:latin typeface="Cambria Math" panose="02040503050406030204" pitchFamily="18" charset="0"/>
                             <a:ea typeface="Cambria Math" panose="02040503050406030204" pitchFamily="18" charset="0"/>
@@ -18736,7 +18761,7 @@
                     <m:d>
                       <m:dPr>
                         <m:ctrlPr>
-                          <a:rPr lang="en-US" i="1" smtClean="0">
+                          <a:rPr lang="en-US" b="0" i="1" smtClean="0">
                             <a:latin typeface="Cambria Math" panose="02040503050406030204" pitchFamily="18" charset="0"/>
                           </a:rPr>
                         </m:ctrlPr>
@@ -18754,11 +18779,15 @@
                             <m:ctrlPr>
                               <a:rPr lang="en-US" i="1">
                                 <a:latin typeface="Cambria Math" panose="02040503050406030204" pitchFamily="18" charset="0"/>
+                                <a:ea typeface="Cambria Math" panose="02040503050406030204" pitchFamily="18" charset="0"/>
                               </a:rPr>
                             </m:ctrlPr>
                           </m:accPr>
                           <m:e>
                             <m:r>
+                              <m:rPr>
+                                <m:sty m:val="p"/>
+                              </m:rPr>
                               <a:rPr lang="en-US" i="1">
                                 <a:latin typeface="Cambria Math" panose="02040503050406030204" pitchFamily="18" charset="0"/>
                                 <a:ea typeface="Cambria Math" panose="02040503050406030204" pitchFamily="18" charset="0"/>
@@ -18820,11 +18849,15 @@
                         <m:ctrlPr>
                           <a:rPr lang="en-US" i="1">
                             <a:latin typeface="Cambria Math" panose="02040503050406030204" pitchFamily="18" charset="0"/>
+                            <a:ea typeface="Cambria Math" panose="02040503050406030204" pitchFamily="18" charset="0"/>
                           </a:rPr>
                         </m:ctrlPr>
                       </m:accPr>
                       <m:e>
                         <m:r>
+                          <m:rPr>
+                            <m:sty m:val="p"/>
+                          </m:rPr>
                           <a:rPr lang="en-US" i="1">
                             <a:latin typeface="Cambria Math" panose="02040503050406030204" pitchFamily="18" charset="0"/>
                             <a:ea typeface="Cambria Math" panose="02040503050406030204" pitchFamily="18" charset="0"/>
